--- a/환경경제학/2026-1/환경경제학_Chapter_03.pptx
+++ b/환경경제학/2026-1/환경경제학_Chapter_03.pptx
@@ -5,7 +5,7 @@
     <p:sldMasterId id="2147483648" r:id="rId1"/>
   </p:sldMasterIdLst>
   <p:notesMasterIdLst>
-    <p:notesMasterId r:id="rId23"/>
+    <p:notesMasterId r:id="rId26"/>
   </p:notesMasterIdLst>
   <p:sldIdLst>
     <p:sldId id="375" r:id="rId2"/>
@@ -28,7 +28,10 @@
     <p:sldId id="593" r:id="rId19"/>
     <p:sldId id="594" r:id="rId20"/>
     <p:sldId id="595" r:id="rId21"/>
-    <p:sldId id="364" r:id="rId22"/>
+    <p:sldId id="597" r:id="rId22"/>
+    <p:sldId id="598" r:id="rId23"/>
+    <p:sldId id="599" r:id="rId24"/>
+    <p:sldId id="364" r:id="rId25"/>
   </p:sldIdLst>
   <p:sldSz cx="12192000" cy="6858000"/>
   <p:notesSz cx="6858000" cy="9144000"/>
@@ -228,7 +231,7 @@
           <a:p>
             <a:fld id="{4A5E00EF-AEA4-43E2-9451-8F9C59A39471}" type="datetimeFigureOut">
               <a:rPr lang="ko-KR" altLang="en-US" smtClean="0"/>
-              <a:t>2026-09-03</a:t>
+              <a:t>2026-09-04</a:t>
             </a:fld>
             <a:endParaRPr lang="ko-KR" altLang="en-US"/>
           </a:p>
@@ -650,7 +653,7 @@
           <a:p>
             <a:fld id="{CD32C56F-BD27-4999-9E6D-D4EACE3DA9F4}" type="datetime1">
               <a:rPr lang="ko-KR" altLang="en-US" smtClean="0"/>
-              <a:t>2026-09-03</a:t>
+              <a:t>2026-09-04</a:t>
             </a:fld>
             <a:endParaRPr lang="ko-KR" altLang="en-US"/>
           </a:p>
@@ -864,7 +867,7 @@
           <a:p>
             <a:fld id="{8EF4A19C-72C8-45CA-8E3F-68A7FA345D6C}" type="datetime1">
               <a:rPr lang="ko-KR" altLang="en-US" smtClean="0"/>
-              <a:t>2026-09-03</a:t>
+              <a:t>2026-09-04</a:t>
             </a:fld>
             <a:endParaRPr lang="ko-KR" altLang="en-US"/>
           </a:p>
@@ -1088,7 +1091,7 @@
           <a:p>
             <a:fld id="{56A175B2-010B-4341-954C-5F8F5C70B124}" type="datetime1">
               <a:rPr lang="ko-KR" altLang="en-US" smtClean="0"/>
-              <a:t>2026-09-03</a:t>
+              <a:t>2026-09-04</a:t>
             </a:fld>
             <a:endParaRPr lang="ko-KR" altLang="en-US"/>
           </a:p>
@@ -1302,7 +1305,7 @@
           <a:p>
             <a:fld id="{16B83F9E-22C9-45CA-9E85-070F1D3EF530}" type="datetime1">
               <a:rPr lang="ko-KR" altLang="en-US" smtClean="0"/>
-              <a:t>2026-09-03</a:t>
+              <a:t>2026-09-04</a:t>
             </a:fld>
             <a:endParaRPr lang="ko-KR" altLang="en-US"/>
           </a:p>
@@ -1593,7 +1596,7 @@
           <a:p>
             <a:fld id="{03278F45-FB3C-4C4D-B89A-7BC3F5F229F6}" type="datetime1">
               <a:rPr lang="ko-KR" altLang="en-US" smtClean="0"/>
-              <a:t>2026-09-03</a:t>
+              <a:t>2026-09-04</a:t>
             </a:fld>
             <a:endParaRPr lang="ko-KR" altLang="en-US"/>
           </a:p>
@@ -1986,7 +1989,7 @@
           <a:p>
             <a:fld id="{38FDAC3C-35A6-415C-9F03-738A6AC328B1}" type="datetime1">
               <a:rPr lang="ko-KR" altLang="en-US" smtClean="0"/>
-              <a:t>2026-09-03</a:t>
+              <a:t>2026-09-04</a:t>
             </a:fld>
             <a:endParaRPr lang="ko-KR" altLang="en-US"/>
           </a:p>
@@ -3580,7 +3583,7 @@
           <a:p>
             <a:fld id="{507A0DF1-AEE6-4B0D-89D2-351E7B3EF65C}" type="datetime1">
               <a:rPr lang="ko-KR" altLang="en-US" smtClean="0"/>
-              <a:t>2026-09-03</a:t>
+              <a:t>2026-09-04</a:t>
             </a:fld>
             <a:endParaRPr lang="ko-KR" altLang="en-US"/>
           </a:p>
@@ -4008,7 +4011,7 @@
           <a:p>
             <a:fld id="{CA93B8C9-630F-4D57-944D-04FD37CECCD3}" type="datetime1">
               <a:rPr lang="ko-KR" altLang="en-US" smtClean="0"/>
-              <a:t>2026-09-03</a:t>
+              <a:t>2026-09-04</a:t>
             </a:fld>
             <a:endParaRPr lang="ko-KR" altLang="en-US"/>
           </a:p>
@@ -4165,7 +4168,7 @@
           <a:p>
             <a:fld id="{E986165A-AC43-4902-9541-874ECD310BA3}" type="datetime1">
               <a:rPr lang="ko-KR" altLang="en-US" smtClean="0"/>
-              <a:t>2026-09-03</a:t>
+              <a:t>2026-09-04</a:t>
             </a:fld>
             <a:endParaRPr lang="ko-KR" altLang="en-US"/>
           </a:p>
@@ -4492,7 +4495,7 @@
           <a:p>
             <a:fld id="{47E6EE6D-2B0E-43A9-87A2-7354CDB998F4}" type="datetime1">
               <a:rPr lang="ko-KR" altLang="en-US" smtClean="0"/>
-              <a:t>2026-09-03</a:t>
+              <a:t>2026-09-04</a:t>
             </a:fld>
             <a:endParaRPr lang="ko-KR" altLang="en-US"/>
           </a:p>
@@ -4796,7 +4799,7 @@
           <a:p>
             <a:fld id="{5CC5944E-0BC8-4FAA-9F94-6B4B05834E10}" type="datetime1">
               <a:rPr lang="ko-KR" altLang="en-US" smtClean="0"/>
-              <a:t>2026-09-03</a:t>
+              <a:t>2026-09-04</a:t>
             </a:fld>
             <a:endParaRPr lang="ko-KR" altLang="en-US"/>
           </a:p>
@@ -10101,8 +10104,8 @@
           </a:prstGeom>
         </p:spPr>
       </p:pic>
-      <mc:AlternateContent xmlns:mc="http://schemas.openxmlformats.org/markup-compatibility/2006">
-        <mc:Choice xmlns:a14="http://schemas.microsoft.com/office/drawing/2010/main" Requires="a14">
+      <mc:AlternateContent xmlns:mc="http://schemas.openxmlformats.org/markup-compatibility/2006" xmlns:a14="http://schemas.microsoft.com/office/drawing/2010/main">
+        <mc:Choice Requires="a14">
           <p:sp>
             <p:nvSpPr>
               <p:cNvPr id="8" name="TextBox 7">
@@ -10226,7 +10229,7 @@
             </p:txBody>
           </p:sp>
         </mc:Choice>
-        <mc:Fallback>
+        <mc:Fallback xmlns="">
           <p:sp>
             <p:nvSpPr>
               <p:cNvPr id="8" name="TextBox 7">
@@ -10271,8 +10274,8 @@
           </p:sp>
         </mc:Fallback>
       </mc:AlternateContent>
-      <mc:AlternateContent xmlns:mc="http://schemas.openxmlformats.org/markup-compatibility/2006">
-        <mc:Choice xmlns:a14="http://schemas.microsoft.com/office/drawing/2010/main" Requires="a14">
+      <mc:AlternateContent xmlns:mc="http://schemas.openxmlformats.org/markup-compatibility/2006" xmlns:a14="http://schemas.microsoft.com/office/drawing/2010/main">
+        <mc:Choice Requires="a14">
           <p:sp>
             <p:nvSpPr>
               <p:cNvPr id="14" name="TextBox 13">
@@ -10396,7 +10399,7 @@
             </p:txBody>
           </p:sp>
         </mc:Choice>
-        <mc:Fallback>
+        <mc:Fallback xmlns="">
           <p:sp>
             <p:nvSpPr>
               <p:cNvPr id="14" name="TextBox 13">
@@ -10441,8 +10444,8 @@
           </p:sp>
         </mc:Fallback>
       </mc:AlternateContent>
-      <mc:AlternateContent xmlns:mc="http://schemas.openxmlformats.org/markup-compatibility/2006">
-        <mc:Choice xmlns:a14="http://schemas.microsoft.com/office/drawing/2010/main" Requires="a14">
+      <mc:AlternateContent xmlns:mc="http://schemas.openxmlformats.org/markup-compatibility/2006" xmlns:a14="http://schemas.microsoft.com/office/drawing/2010/main">
+        <mc:Choice Requires="a14">
           <p:sp>
             <p:nvSpPr>
               <p:cNvPr id="16" name="TextBox 15">
@@ -10566,7 +10569,7 @@
             </p:txBody>
           </p:sp>
         </mc:Choice>
-        <mc:Fallback>
+        <mc:Fallback xmlns="">
           <p:sp>
             <p:nvSpPr>
               <p:cNvPr id="16" name="TextBox 15">
@@ -11257,6 +11260,1112 @@
         <p:cNvPr id="1" name="">
           <a:extLst>
             <a:ext uri="{FF2B5EF4-FFF2-40B4-BE49-F238E27FC236}">
+              <a16:creationId xmlns:a16="http://schemas.microsoft.com/office/drawing/2014/main" id="{46F2EE14-88DE-19EF-8024-F57DB042BA40}"/>
+            </a:ext>
+          </a:extLst>
+        </p:cNvPr>
+        <p:cNvGrpSpPr/>
+        <p:nvPr/>
+      </p:nvGrpSpPr>
+      <p:grpSpPr>
+        <a:xfrm>
+          <a:off x="0" y="0"/>
+          <a:ext cx="0" cy="0"/>
+          <a:chOff x="0" y="0"/>
+          <a:chExt cx="0" cy="0"/>
+        </a:xfrm>
+      </p:grpSpPr>
+      <p:pic>
+        <p:nvPicPr>
+          <p:cNvPr id="6" name="그림 5" descr="텍스트, 로고, 원, 폰트이(가) 표시된 사진&#10;&#10;AI 생성 콘텐츠는 정확하지 않을 수 있습니다.">
+            <a:extLst>
+              <a:ext uri="{FF2B5EF4-FFF2-40B4-BE49-F238E27FC236}">
+                <a16:creationId xmlns:a16="http://schemas.microsoft.com/office/drawing/2014/main" id="{CD0A6D11-B5BC-00EB-45B1-DE548C2E0174}"/>
+              </a:ext>
+            </a:extLst>
+          </p:cNvPr>
+          <p:cNvPicPr>
+            <a:picLocks noChangeAspect="1"/>
+          </p:cNvPicPr>
+          <p:nvPr/>
+        </p:nvPicPr>
+        <p:blipFill>
+          <a:blip r:embed="rId2">
+            <a:alphaModFix amt="20000"/>
+            <a:extLst>
+              <a:ext uri="{28A0092B-C50C-407E-A947-70E740481C1C}">
+                <a14:useLocalDpi xmlns:a14="http://schemas.microsoft.com/office/drawing/2010/main" val="0"/>
+              </a:ext>
+            </a:extLst>
+          </a:blip>
+          <a:stretch>
+            <a:fillRect/>
+          </a:stretch>
+        </p:blipFill>
+        <p:spPr>
+          <a:xfrm>
+            <a:off x="4012070" y="1673061"/>
+            <a:ext cx="4167861" cy="4167861"/>
+          </a:xfrm>
+          <a:prstGeom prst="rect">
+            <a:avLst/>
+          </a:prstGeom>
+        </p:spPr>
+      </p:pic>
+      <p:sp>
+        <p:nvSpPr>
+          <p:cNvPr id="4" name="슬라이드 번호 개체 틀 3">
+            <a:extLst>
+              <a:ext uri="{FF2B5EF4-FFF2-40B4-BE49-F238E27FC236}">
+                <a16:creationId xmlns:a16="http://schemas.microsoft.com/office/drawing/2014/main" id="{020D4222-A669-44F8-96E2-8BD3B2AE17CB}"/>
+              </a:ext>
+            </a:extLst>
+          </p:cNvPr>
+          <p:cNvSpPr>
+            <a:spLocks noGrp="1"/>
+          </p:cNvSpPr>
+          <p:nvPr>
+            <p:ph type="sldNum" sz="quarter" idx="12"/>
+          </p:nvPr>
+        </p:nvSpPr>
+        <p:spPr/>
+        <p:txBody>
+          <a:bodyPr/>
+          <a:lstStyle/>
+          <a:p>
+            <a:fld id="{109C872D-39A9-4065-8BF3-6A613116E2A1}" type="slidenum">
+              <a:rPr lang="ko-KR" altLang="en-US" smtClean="0"/>
+              <a:t>21</a:t>
+            </a:fld>
+            <a:endParaRPr lang="ko-KR" altLang="en-US"/>
+          </a:p>
+        </p:txBody>
+      </p:sp>
+      <p:sp>
+        <p:nvSpPr>
+          <p:cNvPr id="7" name="제목 1">
+            <a:extLst>
+              <a:ext uri="{FF2B5EF4-FFF2-40B4-BE49-F238E27FC236}">
+                <a16:creationId xmlns:a16="http://schemas.microsoft.com/office/drawing/2014/main" id="{6075F3D6-5C53-287B-79C1-6D9497C282CE}"/>
+              </a:ext>
+            </a:extLst>
+          </p:cNvPr>
+          <p:cNvSpPr>
+            <a:spLocks noGrp="1"/>
+          </p:cNvSpPr>
+          <p:nvPr>
+            <p:ph type="title"/>
+          </p:nvPr>
+        </p:nvSpPr>
+        <p:spPr>
+          <a:xfrm>
+            <a:off x="831850" y="3765550"/>
+            <a:ext cx="11150600" cy="652818"/>
+          </a:xfrm>
+          <a:effectLst>
+            <a:reflection blurRad="50800" stA="45000" endPos="44000" dir="5400000" sy="-100000" algn="bl" rotWithShape="0"/>
+          </a:effectLst>
+        </p:spPr>
+        <p:txBody>
+          <a:bodyPr anchor="b"/>
+          <a:lstStyle/>
+          <a:p>
+            <a:r>
+              <a:rPr lang="en-US" altLang="ko-KR" sz="4000" b="1" i="0" spc="150" dirty="0"/>
+              <a:t>Section 3. </a:t>
+            </a:r>
+            <a:r>
+              <a:rPr lang="ko-KR" altLang="en-US" sz="4000" b="1" i="0" spc="150" dirty="0"/>
+              <a:t>시장균형</a:t>
+            </a:r>
+            <a:endParaRPr lang="ko-KR" altLang="en-US" sz="3600" i="0" spc="150" dirty="0"/>
+          </a:p>
+        </p:txBody>
+      </p:sp>
+    </p:spTree>
+    <p:extLst>
+      <p:ext uri="{BB962C8B-B14F-4D97-AF65-F5344CB8AC3E}">
+        <p14:creationId xmlns:p14="http://schemas.microsoft.com/office/powerpoint/2010/main" val="1560623598"/>
+      </p:ext>
+    </p:extLst>
+  </p:cSld>
+  <p:clrMapOvr>
+    <a:masterClrMapping/>
+  </p:clrMapOvr>
+</p:sld>
+</file>
+
+<file path=ppt/slides/slide22.xml><?xml version="1.0" encoding="utf-8"?>
+<p:sld xmlns:a="http://schemas.openxmlformats.org/drawingml/2006/main" xmlns:r="http://schemas.openxmlformats.org/officeDocument/2006/relationships" xmlns:p="http://schemas.openxmlformats.org/presentationml/2006/main">
+  <p:cSld>
+    <p:spTree>
+      <p:nvGrpSpPr>
+        <p:cNvPr id="1" name="">
+          <a:extLst>
+            <a:ext uri="{FF2B5EF4-FFF2-40B4-BE49-F238E27FC236}">
+              <a16:creationId xmlns:a16="http://schemas.microsoft.com/office/drawing/2014/main" id="{D0621CB1-5690-FC54-3D40-03D9A842F917}"/>
+            </a:ext>
+          </a:extLst>
+        </p:cNvPr>
+        <p:cNvGrpSpPr/>
+        <p:nvPr/>
+      </p:nvGrpSpPr>
+      <p:grpSpPr>
+        <a:xfrm>
+          <a:off x="0" y="0"/>
+          <a:ext cx="0" cy="0"/>
+          <a:chOff x="0" y="0"/>
+          <a:chExt cx="0" cy="0"/>
+        </a:xfrm>
+      </p:grpSpPr>
+      <p:sp>
+        <p:nvSpPr>
+          <p:cNvPr id="2" name="제목 1">
+            <a:extLst>
+              <a:ext uri="{FF2B5EF4-FFF2-40B4-BE49-F238E27FC236}">
+                <a16:creationId xmlns:a16="http://schemas.microsoft.com/office/drawing/2014/main" id="{13DAB20A-6AC2-D1CF-EA7E-BDA4750BF768}"/>
+              </a:ext>
+            </a:extLst>
+          </p:cNvPr>
+          <p:cNvSpPr>
+            <a:spLocks noGrp="1"/>
+          </p:cNvSpPr>
+          <p:nvPr>
+            <p:ph type="title"/>
+          </p:nvPr>
+        </p:nvSpPr>
+        <p:spPr/>
+        <p:txBody>
+          <a:bodyPr/>
+          <a:lstStyle/>
+          <a:p>
+            <a:r>
+              <a:rPr lang="ko-KR" altLang="en-US"/>
+              <a:t>시장균형</a:t>
+            </a:r>
+            <a:endParaRPr lang="ko-KR" altLang="en-US" dirty="0"/>
+          </a:p>
+        </p:txBody>
+      </p:sp>
+      <p:sp>
+        <p:nvSpPr>
+          <p:cNvPr id="4" name="슬라이드 번호 개체 틀 3">
+            <a:extLst>
+              <a:ext uri="{FF2B5EF4-FFF2-40B4-BE49-F238E27FC236}">
+                <a16:creationId xmlns:a16="http://schemas.microsoft.com/office/drawing/2014/main" id="{A80FE41E-9C44-0E25-37B2-7A10CDAF26A5}"/>
+              </a:ext>
+            </a:extLst>
+          </p:cNvPr>
+          <p:cNvSpPr>
+            <a:spLocks noGrp="1"/>
+          </p:cNvSpPr>
+          <p:nvPr>
+            <p:ph type="sldNum" sz="quarter" idx="12"/>
+          </p:nvPr>
+        </p:nvSpPr>
+        <p:spPr/>
+        <p:txBody>
+          <a:bodyPr/>
+          <a:lstStyle/>
+          <a:p>
+            <a:fld id="{109C872D-39A9-4065-8BF3-6A613116E2A1}" type="slidenum">
+              <a:rPr lang="ko-KR" altLang="en-US" smtClean="0"/>
+              <a:t>22</a:t>
+            </a:fld>
+            <a:endParaRPr lang="ko-KR" altLang="en-US"/>
+          </a:p>
+        </p:txBody>
+      </p:sp>
+      <p:sp>
+        <p:nvSpPr>
+          <p:cNvPr id="5" name="TextBox 4">
+            <a:extLst>
+              <a:ext uri="{FF2B5EF4-FFF2-40B4-BE49-F238E27FC236}">
+                <a16:creationId xmlns:a16="http://schemas.microsoft.com/office/drawing/2014/main" id="{D54EC1B2-5493-FDF9-041F-26E157C7ED8B}"/>
+              </a:ext>
+            </a:extLst>
+          </p:cNvPr>
+          <p:cNvSpPr txBox="1"/>
+          <p:nvPr/>
+        </p:nvSpPr>
+        <p:spPr>
+          <a:xfrm>
+            <a:off x="288790" y="787394"/>
+            <a:ext cx="10707658" cy="3368679"/>
+          </a:xfrm>
+          <a:prstGeom prst="rect">
+            <a:avLst/>
+          </a:prstGeom>
+          <a:noFill/>
+        </p:spPr>
+        <p:txBody>
+          <a:bodyPr wrap="square" rtlCol="0" anchor="t">
+            <a:spAutoFit/>
+          </a:bodyPr>
+          <a:lstStyle/>
+          <a:p>
+            <a:pPr marL="377825" indent="-285750">
+              <a:lnSpc>
+                <a:spcPct val="150000"/>
+              </a:lnSpc>
+              <a:buFont typeface="Arial" panose="020B0604020202020204" pitchFamily="34" charset="0"/>
+              <a:buChar char="•"/>
+            </a:pPr>
+            <a:r>
+              <a:rPr lang="ko-KR" altLang="en-US" sz="1600" spc="-50" dirty="0"/>
+              <a:t>앞서 수요곡선과 공급곡선을 각각 주어진 시장가격에서 소비자가 소비하려는 양</a:t>
+            </a:r>
+            <a:r>
+              <a:rPr lang="en-US" altLang="ko-KR" sz="1600" spc="-50" dirty="0"/>
+              <a:t>, </a:t>
+            </a:r>
+            <a:r>
+              <a:rPr lang="ko-KR" altLang="en-US" sz="1600" spc="-50" dirty="0"/>
+              <a:t>그리고 생산자가 공급하려는 양이라고 정의하였다</a:t>
+            </a:r>
+            <a:r>
+              <a:rPr lang="en-US" altLang="ko-KR" sz="1600" spc="-50" dirty="0"/>
+              <a:t>.</a:t>
+            </a:r>
+          </a:p>
+          <a:p>
+            <a:pPr marL="835025" lvl="1" indent="-285750">
+              <a:lnSpc>
+                <a:spcPct val="150000"/>
+              </a:lnSpc>
+              <a:buFont typeface="Wingdings" panose="05000000000000000000" pitchFamily="2" charset="2"/>
+              <a:buChar char="ü"/>
+            </a:pPr>
+            <a:r>
+              <a:rPr lang="ko-KR" altLang="en-US" sz="1600" spc="-50" dirty="0"/>
+              <a:t>그러나 시장가격은 외부로부터 주어지는 것이 아니고</a:t>
+            </a:r>
+            <a:r>
+              <a:rPr lang="en-US" altLang="ko-KR" sz="1600" spc="-50" dirty="0"/>
+              <a:t>, </a:t>
+            </a:r>
+            <a:r>
+              <a:rPr lang="ko-KR" altLang="en-US" sz="1600" spc="-50" dirty="0"/>
+              <a:t>수요와 공급의 상호작용에 의해 내생적으로 결정된다</a:t>
+            </a:r>
+            <a:r>
+              <a:rPr lang="en-US" altLang="ko-KR" sz="1600" spc="-50" dirty="0"/>
+              <a:t>.</a:t>
+            </a:r>
+          </a:p>
+          <a:p>
+            <a:pPr marL="434975" indent="-342900">
+              <a:lnSpc>
+                <a:spcPct val="150000"/>
+              </a:lnSpc>
+              <a:buFont typeface="Arial" panose="020B0604020202020204" pitchFamily="34" charset="0"/>
+              <a:buChar char="•"/>
+            </a:pPr>
+            <a:endParaRPr lang="en-US" altLang="ko-KR" sz="1600" spc="-50" dirty="0"/>
+          </a:p>
+          <a:p>
+            <a:pPr marL="434975" indent="-342900">
+              <a:lnSpc>
+                <a:spcPct val="150000"/>
+              </a:lnSpc>
+              <a:buFont typeface="Arial" panose="020B0604020202020204" pitchFamily="34" charset="0"/>
+              <a:buChar char="•"/>
+            </a:pPr>
+            <a:r>
+              <a:rPr lang="ko-KR" altLang="en-US" sz="1600" spc="-50" dirty="0"/>
+              <a:t>아래 그림에서 수요곡선과 공급곡선이 만나는 점의 생산량은 </a:t>
+            </a:r>
+            <a:r>
+              <a:rPr lang="en-US" altLang="ko-KR" sz="1600" spc="-50" dirty="0"/>
+              <a:t>7.5 </a:t>
+            </a:r>
+            <a:r>
+              <a:rPr lang="ko-KR" altLang="en-US" sz="1600" spc="-50" dirty="0"/>
+              <a:t>이고</a:t>
+            </a:r>
+            <a:r>
+              <a:rPr lang="en-US" altLang="ko-KR" sz="1600" spc="-50" dirty="0"/>
+              <a:t>, </a:t>
+            </a:r>
+            <a:r>
+              <a:rPr lang="ko-KR" altLang="en-US" sz="1600" spc="-50" dirty="0"/>
+              <a:t>이 때의 가격은 </a:t>
+            </a:r>
+            <a:r>
+              <a:rPr lang="en-US" altLang="ko-KR" sz="1600" spc="-50" dirty="0"/>
+              <a:t>500</a:t>
+            </a:r>
+            <a:r>
+              <a:rPr lang="ko-KR" altLang="en-US" sz="1600" spc="-50" dirty="0"/>
+              <a:t>이다</a:t>
+            </a:r>
+            <a:r>
+              <a:rPr lang="en-US" altLang="ko-KR" sz="1600" spc="-50" dirty="0"/>
+              <a:t>.</a:t>
+            </a:r>
+          </a:p>
+          <a:p>
+            <a:pPr marL="892175" lvl="1" indent="-342900">
+              <a:lnSpc>
+                <a:spcPct val="150000"/>
+              </a:lnSpc>
+              <a:buFont typeface="Wingdings" panose="05000000000000000000" pitchFamily="2" charset="2"/>
+              <a:buChar char="ü"/>
+            </a:pPr>
+            <a:r>
+              <a:rPr lang="ko-KR" altLang="en-US" sz="1600" spc="-50" dirty="0"/>
+              <a:t>시장가격이 </a:t>
+            </a:r>
+            <a:r>
+              <a:rPr lang="en-US" altLang="ko-KR" sz="1600" spc="-50" dirty="0"/>
+              <a:t>500</a:t>
+            </a:r>
+            <a:r>
+              <a:rPr lang="ko-KR" altLang="en-US" sz="1600" spc="-50" dirty="0"/>
+              <a:t>원보다 높으면 소비자는 </a:t>
+            </a:r>
+            <a:r>
+              <a:rPr lang="en-US" altLang="ko-KR" sz="1600" spc="-50" dirty="0"/>
+              <a:t>7.5</a:t>
+            </a:r>
+            <a:r>
+              <a:rPr lang="ko-KR" altLang="en-US" sz="1600" spc="-50" dirty="0"/>
+              <a:t>보다 적게 소비하고자 하고</a:t>
+            </a:r>
+            <a:r>
+              <a:rPr lang="en-US" altLang="ko-KR" sz="1600" spc="-50" dirty="0"/>
+              <a:t>, </a:t>
+            </a:r>
+            <a:r>
+              <a:rPr lang="ko-KR" altLang="en-US" sz="1600" spc="-50" dirty="0"/>
+              <a:t>공급자는 </a:t>
+            </a:r>
+            <a:r>
+              <a:rPr lang="en-US" altLang="ko-KR" sz="1600" spc="-50" dirty="0"/>
+              <a:t>7.5</a:t>
+            </a:r>
+            <a:r>
+              <a:rPr lang="ko-KR" altLang="en-US" sz="1600" spc="-50" dirty="0"/>
+              <a:t>보다 많이 공급하고자 하여</a:t>
+            </a:r>
+            <a:r>
+              <a:rPr lang="en-US" altLang="ko-KR" sz="1600" spc="-50" dirty="0"/>
+              <a:t>, </a:t>
+            </a:r>
+            <a:r>
+              <a:rPr lang="ko-KR" altLang="en-US" sz="1600" spc="-50" dirty="0"/>
+              <a:t>초과공급이 발생한다</a:t>
+            </a:r>
+            <a:r>
+              <a:rPr lang="en-US" altLang="ko-KR" sz="1600" spc="-50" dirty="0"/>
+              <a:t>.</a:t>
+            </a:r>
+          </a:p>
+          <a:p>
+            <a:pPr marL="1349375" lvl="2" indent="-342900">
+              <a:lnSpc>
+                <a:spcPct val="150000"/>
+              </a:lnSpc>
+              <a:buFont typeface="Wingdings" panose="05000000000000000000" pitchFamily="2" charset="2"/>
+              <a:buChar char="Ø"/>
+            </a:pPr>
+            <a:r>
+              <a:rPr lang="ko-KR" altLang="en-US" sz="1600" spc="-50" dirty="0"/>
+              <a:t>초과공급이 없어지기 위해서는 시장가격이 하락해야 한다</a:t>
+            </a:r>
+            <a:r>
+              <a:rPr lang="en-US" altLang="ko-KR" sz="1600" spc="-50" dirty="0"/>
+              <a:t>.</a:t>
+            </a:r>
+          </a:p>
+          <a:p>
+            <a:pPr marL="892175" lvl="1" indent="-342900">
+              <a:lnSpc>
+                <a:spcPct val="150000"/>
+              </a:lnSpc>
+              <a:buFont typeface="Wingdings" panose="05000000000000000000" pitchFamily="2" charset="2"/>
+              <a:buChar char="ü"/>
+            </a:pPr>
+            <a:endParaRPr lang="en-US" altLang="ko-KR" sz="1600" spc="-50" dirty="0"/>
+          </a:p>
+        </p:txBody>
+      </p:sp>
+      <p:pic>
+        <p:nvPicPr>
+          <p:cNvPr id="6" name="그림 5" descr="텍스트, 라인, 도표, 그래프이(가) 표시된 사진&#10;&#10;AI 생성 콘텐츠는 정확하지 않을 수 있습니다.">
+            <a:extLst>
+              <a:ext uri="{FF2B5EF4-FFF2-40B4-BE49-F238E27FC236}">
+                <a16:creationId xmlns:a16="http://schemas.microsoft.com/office/drawing/2014/main" id="{5128E75F-DB5A-4789-3945-CA630C536D11}"/>
+              </a:ext>
+            </a:extLst>
+          </p:cNvPr>
+          <p:cNvPicPr>
+            <a:picLocks noChangeAspect="1"/>
+          </p:cNvPicPr>
+          <p:nvPr/>
+        </p:nvPicPr>
+        <p:blipFill>
+          <a:blip r:embed="rId2"/>
+          <a:stretch>
+            <a:fillRect/>
+          </a:stretch>
+        </p:blipFill>
+        <p:spPr>
+          <a:xfrm>
+            <a:off x="8532504" y="3010452"/>
+            <a:ext cx="3064153" cy="3466682"/>
+          </a:xfrm>
+          <a:prstGeom prst="rect">
+            <a:avLst/>
+          </a:prstGeom>
+        </p:spPr>
+      </p:pic>
+      <p:sp>
+        <p:nvSpPr>
+          <p:cNvPr id="8" name="TextBox 7">
+            <a:extLst>
+              <a:ext uri="{FF2B5EF4-FFF2-40B4-BE49-F238E27FC236}">
+                <a16:creationId xmlns:a16="http://schemas.microsoft.com/office/drawing/2014/main" id="{0F12FDD1-F61F-47E8-52D4-D364D2E03195}"/>
+              </a:ext>
+            </a:extLst>
+          </p:cNvPr>
+          <p:cNvSpPr txBox="1"/>
+          <p:nvPr/>
+        </p:nvSpPr>
+        <p:spPr>
+          <a:xfrm>
+            <a:off x="288790" y="3809994"/>
+            <a:ext cx="8243714" cy="2260683"/>
+          </a:xfrm>
+          <a:prstGeom prst="rect">
+            <a:avLst/>
+          </a:prstGeom>
+          <a:noFill/>
+        </p:spPr>
+        <p:txBody>
+          <a:bodyPr wrap="square" rtlCol="0" anchor="t">
+            <a:spAutoFit/>
+          </a:bodyPr>
+          <a:lstStyle/>
+          <a:p>
+            <a:pPr marL="892175" lvl="1" indent="-342900">
+              <a:lnSpc>
+                <a:spcPct val="150000"/>
+              </a:lnSpc>
+              <a:buFont typeface="Wingdings" panose="05000000000000000000" pitchFamily="2" charset="2"/>
+              <a:buChar char="ü"/>
+            </a:pPr>
+            <a:r>
+              <a:rPr lang="ko-KR" altLang="en-US" sz="1600" spc="-50" dirty="0"/>
+              <a:t>시장가격이 </a:t>
+            </a:r>
+            <a:r>
+              <a:rPr lang="en-US" altLang="ko-KR" sz="1600" spc="-50" dirty="0"/>
+              <a:t>500</a:t>
+            </a:r>
+            <a:r>
+              <a:rPr lang="ko-KR" altLang="en-US" sz="1600" spc="-50" dirty="0"/>
+              <a:t>원보다 낮으면 소비자는 </a:t>
+            </a:r>
+            <a:r>
+              <a:rPr lang="en-US" altLang="ko-KR" sz="1600" spc="-50" dirty="0"/>
+              <a:t>7.5</a:t>
+            </a:r>
+            <a:r>
+              <a:rPr lang="ko-KR" altLang="en-US" sz="1600" spc="-50" dirty="0"/>
+              <a:t>보다 많이 소비하고자 하고</a:t>
+            </a:r>
+            <a:r>
+              <a:rPr lang="en-US" altLang="ko-KR" sz="1600" spc="-50" dirty="0"/>
+              <a:t>, </a:t>
+            </a:r>
+            <a:r>
+              <a:rPr lang="ko-KR" altLang="en-US" sz="1600" spc="-50" dirty="0"/>
+              <a:t>공급자는 </a:t>
+            </a:r>
+            <a:r>
+              <a:rPr lang="en-US" altLang="ko-KR" sz="1600" spc="-50" dirty="0"/>
+              <a:t>7.5</a:t>
+            </a:r>
+            <a:r>
+              <a:rPr lang="ko-KR" altLang="en-US" sz="1600" spc="-50" dirty="0"/>
+              <a:t>보다 적게 공급하고자 하여</a:t>
+            </a:r>
+            <a:r>
+              <a:rPr lang="en-US" altLang="ko-KR" sz="1600" spc="-50" dirty="0"/>
+              <a:t>, </a:t>
+            </a:r>
+            <a:r>
+              <a:rPr lang="ko-KR" altLang="en-US" sz="1600" spc="-50" dirty="0"/>
+              <a:t>초과수요가 발생한다</a:t>
+            </a:r>
+            <a:r>
+              <a:rPr lang="en-US" altLang="ko-KR" sz="1600" spc="-50" dirty="0"/>
+              <a:t>.</a:t>
+            </a:r>
+          </a:p>
+          <a:p>
+            <a:pPr marL="1349375" lvl="2" indent="-342900">
+              <a:lnSpc>
+                <a:spcPct val="150000"/>
+              </a:lnSpc>
+              <a:buFont typeface="Wingdings" panose="05000000000000000000" pitchFamily="2" charset="2"/>
+              <a:buChar char="Ø"/>
+            </a:pPr>
+            <a:r>
+              <a:rPr lang="ko-KR" altLang="en-US" sz="1600" spc="-50" dirty="0"/>
+              <a:t>초과수요가 없어지기 위해서는 시장가격이 상승해야 한다</a:t>
+            </a:r>
+            <a:r>
+              <a:rPr lang="en-US" altLang="ko-KR" sz="1600" spc="-50" dirty="0"/>
+              <a:t>.</a:t>
+            </a:r>
+          </a:p>
+          <a:p>
+            <a:pPr marL="434975" indent="-342900">
+              <a:lnSpc>
+                <a:spcPct val="150000"/>
+              </a:lnSpc>
+              <a:buFont typeface="Arial" panose="020B0604020202020204" pitchFamily="34" charset="0"/>
+              <a:buChar char="•"/>
+            </a:pPr>
+            <a:endParaRPr lang="en-US" altLang="ko-KR" sz="1600" spc="-50" dirty="0"/>
+          </a:p>
+          <a:p>
+            <a:pPr marL="434975" indent="-342900">
+              <a:lnSpc>
+                <a:spcPct val="150000"/>
+              </a:lnSpc>
+              <a:buFont typeface="Arial" panose="020B0604020202020204" pitchFamily="34" charset="0"/>
+              <a:buChar char="•"/>
+            </a:pPr>
+            <a:r>
+              <a:rPr lang="ko-KR" altLang="en-US" sz="1600" spc="-50" dirty="0"/>
+              <a:t>위의 과정이 수요와 공급이 균형을 이루 때까지 시장가격이 변하여 시장이 청산되는데</a:t>
+            </a:r>
+            <a:r>
+              <a:rPr lang="en-US" altLang="ko-KR" sz="1600" spc="-50" dirty="0"/>
+              <a:t>, </a:t>
+            </a:r>
+            <a:r>
+              <a:rPr lang="ko-KR" altLang="en-US" sz="1600" spc="-50" dirty="0"/>
+              <a:t>이를 </a:t>
+            </a:r>
+            <a:r>
+              <a:rPr lang="ko-KR" altLang="en-US" sz="1600" spc="-50" dirty="0" err="1"/>
+              <a:t>시장메커니즘이라</a:t>
+            </a:r>
+            <a:r>
+              <a:rPr lang="ko-KR" altLang="en-US" sz="1600" spc="-50" dirty="0"/>
+              <a:t> 부른다</a:t>
+            </a:r>
+            <a:r>
+              <a:rPr lang="en-US" altLang="ko-KR" sz="1600" spc="-50" dirty="0"/>
+              <a:t>.</a:t>
+            </a:r>
+          </a:p>
+        </p:txBody>
+      </p:sp>
+    </p:spTree>
+    <p:extLst>
+      <p:ext uri="{BB962C8B-B14F-4D97-AF65-F5344CB8AC3E}">
+        <p14:creationId xmlns:p14="http://schemas.microsoft.com/office/powerpoint/2010/main" val="2703888794"/>
+      </p:ext>
+    </p:extLst>
+  </p:cSld>
+  <p:clrMapOvr>
+    <a:masterClrMapping/>
+  </p:clrMapOvr>
+</p:sld>
+</file>
+
+<file path=ppt/slides/slide23.xml><?xml version="1.0" encoding="utf-8"?>
+<p:sld xmlns:a="http://schemas.openxmlformats.org/drawingml/2006/main" xmlns:r="http://schemas.openxmlformats.org/officeDocument/2006/relationships" xmlns:p="http://schemas.openxmlformats.org/presentationml/2006/main">
+  <p:cSld>
+    <p:spTree>
+      <p:nvGrpSpPr>
+        <p:cNvPr id="1" name="">
+          <a:extLst>
+            <a:ext uri="{FF2B5EF4-FFF2-40B4-BE49-F238E27FC236}">
+              <a16:creationId xmlns:a16="http://schemas.microsoft.com/office/drawing/2014/main" id="{80BB9D77-05B5-7290-2E29-57F265244F27}"/>
+            </a:ext>
+          </a:extLst>
+        </p:cNvPr>
+        <p:cNvGrpSpPr/>
+        <p:nvPr/>
+      </p:nvGrpSpPr>
+      <p:grpSpPr>
+        <a:xfrm>
+          <a:off x="0" y="0"/>
+          <a:ext cx="0" cy="0"/>
+          <a:chOff x="0" y="0"/>
+          <a:chExt cx="0" cy="0"/>
+        </a:xfrm>
+      </p:grpSpPr>
+      <p:sp>
+        <p:nvSpPr>
+          <p:cNvPr id="2" name="제목 1">
+            <a:extLst>
+              <a:ext uri="{FF2B5EF4-FFF2-40B4-BE49-F238E27FC236}">
+                <a16:creationId xmlns:a16="http://schemas.microsoft.com/office/drawing/2014/main" id="{D8901D70-18CA-FDFE-9023-1D88397AEE26}"/>
+              </a:ext>
+            </a:extLst>
+          </p:cNvPr>
+          <p:cNvSpPr>
+            <a:spLocks noGrp="1"/>
+          </p:cNvSpPr>
+          <p:nvPr>
+            <p:ph type="title"/>
+          </p:nvPr>
+        </p:nvSpPr>
+        <p:spPr/>
+        <p:txBody>
+          <a:bodyPr/>
+          <a:lstStyle/>
+          <a:p>
+            <a:r>
+              <a:rPr lang="ko-KR" altLang="en-US" dirty="0" err="1"/>
+              <a:t>시장메커니즘의</a:t>
+            </a:r>
+            <a:r>
+              <a:rPr lang="ko-KR" altLang="en-US" dirty="0"/>
+              <a:t> 효율성</a:t>
+            </a:r>
+          </a:p>
+        </p:txBody>
+      </p:sp>
+      <p:sp>
+        <p:nvSpPr>
+          <p:cNvPr id="4" name="슬라이드 번호 개체 틀 3">
+            <a:extLst>
+              <a:ext uri="{FF2B5EF4-FFF2-40B4-BE49-F238E27FC236}">
+                <a16:creationId xmlns:a16="http://schemas.microsoft.com/office/drawing/2014/main" id="{C2D8778E-0702-80AB-46B9-09FF2780F31A}"/>
+              </a:ext>
+            </a:extLst>
+          </p:cNvPr>
+          <p:cNvSpPr>
+            <a:spLocks noGrp="1"/>
+          </p:cNvSpPr>
+          <p:nvPr>
+            <p:ph type="sldNum" sz="quarter" idx="12"/>
+          </p:nvPr>
+        </p:nvSpPr>
+        <p:spPr/>
+        <p:txBody>
+          <a:bodyPr/>
+          <a:lstStyle/>
+          <a:p>
+            <a:fld id="{109C872D-39A9-4065-8BF3-6A613116E2A1}" type="slidenum">
+              <a:rPr lang="ko-KR" altLang="en-US" smtClean="0"/>
+              <a:t>23</a:t>
+            </a:fld>
+            <a:endParaRPr lang="ko-KR" altLang="en-US"/>
+          </a:p>
+        </p:txBody>
+      </p:sp>
+      <p:sp>
+        <p:nvSpPr>
+          <p:cNvPr id="5" name="TextBox 4">
+            <a:extLst>
+              <a:ext uri="{FF2B5EF4-FFF2-40B4-BE49-F238E27FC236}">
+                <a16:creationId xmlns:a16="http://schemas.microsoft.com/office/drawing/2014/main" id="{0FA18D02-8502-8C9B-8BE7-73EB741C8D0E}"/>
+              </a:ext>
+            </a:extLst>
+          </p:cNvPr>
+          <p:cNvSpPr txBox="1"/>
+          <p:nvPr/>
+        </p:nvSpPr>
+        <p:spPr>
+          <a:xfrm>
+            <a:off x="288790" y="787394"/>
+            <a:ext cx="11407910" cy="2630015"/>
+          </a:xfrm>
+          <a:prstGeom prst="rect">
+            <a:avLst/>
+          </a:prstGeom>
+          <a:noFill/>
+        </p:spPr>
+        <p:txBody>
+          <a:bodyPr wrap="square" rtlCol="0" anchor="t">
+            <a:spAutoFit/>
+          </a:bodyPr>
+          <a:lstStyle/>
+          <a:p>
+            <a:pPr marL="377825" indent="-285750">
+              <a:lnSpc>
+                <a:spcPct val="150000"/>
+              </a:lnSpc>
+              <a:buFont typeface="Arial" panose="020B0604020202020204" pitchFamily="34" charset="0"/>
+              <a:buChar char="•"/>
+            </a:pPr>
+            <a:r>
+              <a:rPr lang="en-US" altLang="ko-KR" sz="1600" spc="-50" dirty="0"/>
+              <a:t>7.5</a:t>
+            </a:r>
+            <a:r>
+              <a:rPr lang="ko-KR" altLang="en-US" sz="1600" spc="-50" dirty="0"/>
+              <a:t>단위의 상품을 소비하여</a:t>
+            </a:r>
+            <a:r>
+              <a:rPr lang="en-US" altLang="ko-KR" sz="1600" spc="-50" dirty="0"/>
+              <a:t>, </a:t>
+            </a:r>
+            <a:r>
+              <a:rPr lang="ko-KR" altLang="en-US" sz="1600" spc="-50" dirty="0"/>
+              <a:t>전체 소비자들이 얻는 사회적 총편익은 </a:t>
+            </a:r>
+            <a:r>
+              <a:rPr lang="en-US" altLang="ko-KR" sz="1600" spc="-50" dirty="0"/>
+              <a:t>0</a:t>
+            </a:r>
+            <a:r>
+              <a:rPr lang="ko-KR" altLang="en-US" sz="1600" spc="-50" dirty="0"/>
+              <a:t>과 </a:t>
+            </a:r>
+            <a:r>
+              <a:rPr lang="en-US" altLang="ko-KR" sz="1600" spc="-50" dirty="0"/>
+              <a:t>7.5 </a:t>
+            </a:r>
+            <a:r>
+              <a:rPr lang="ko-KR" altLang="en-US" sz="1600" spc="-50" dirty="0"/>
+              <a:t>사이에 형성되는 시장수요곡선 아래의 면적이다</a:t>
+            </a:r>
+            <a:r>
+              <a:rPr lang="en-US" altLang="ko-KR" sz="1600" spc="-50" dirty="0"/>
+              <a:t>.</a:t>
+            </a:r>
+          </a:p>
+          <a:p>
+            <a:pPr marL="377825" indent="-285750">
+              <a:lnSpc>
+                <a:spcPct val="150000"/>
+              </a:lnSpc>
+              <a:buFont typeface="Arial" panose="020B0604020202020204" pitchFamily="34" charset="0"/>
+              <a:buChar char="•"/>
+            </a:pPr>
+            <a:r>
+              <a:rPr lang="ko-KR" altLang="en-US" sz="1600" spc="-50" dirty="0"/>
+              <a:t>반면 </a:t>
+            </a:r>
+            <a:r>
+              <a:rPr lang="en-US" altLang="ko-KR" sz="1600" spc="-50" dirty="0"/>
+              <a:t>7.5</a:t>
+            </a:r>
+            <a:r>
+              <a:rPr lang="ko-KR" altLang="en-US" sz="1600" spc="-50" dirty="0"/>
+              <a:t>단위를 생산하기 위하여 사회전체가 지불하는 비용은 </a:t>
+            </a:r>
+            <a:r>
+              <a:rPr lang="en-US" altLang="ko-KR" sz="1600" spc="-50" dirty="0"/>
+              <a:t>0</a:t>
+            </a:r>
+            <a:r>
+              <a:rPr lang="ko-KR" altLang="en-US" sz="1600" spc="-50" dirty="0"/>
+              <a:t>과 </a:t>
+            </a:r>
+            <a:r>
+              <a:rPr lang="en-US" altLang="ko-KR" sz="1600" spc="-50" dirty="0"/>
+              <a:t>7.5 </a:t>
+            </a:r>
+            <a:r>
+              <a:rPr lang="ko-KR" altLang="en-US" sz="1600" spc="-50" dirty="0"/>
+              <a:t>사이에 형성되는 시장공급곡선의 아래 면적이 된다</a:t>
+            </a:r>
+            <a:r>
+              <a:rPr lang="en-US" altLang="ko-KR" sz="1600" spc="-50" dirty="0"/>
+              <a:t>.</a:t>
+            </a:r>
+          </a:p>
+          <a:p>
+            <a:pPr marL="434975" indent="-342900">
+              <a:lnSpc>
+                <a:spcPct val="150000"/>
+              </a:lnSpc>
+              <a:buFont typeface="Arial" panose="020B0604020202020204" pitchFamily="34" charset="0"/>
+              <a:buChar char="•"/>
+            </a:pPr>
+            <a:endParaRPr lang="en-US" altLang="ko-KR" sz="1600" spc="-50" dirty="0"/>
+          </a:p>
+          <a:p>
+            <a:pPr marL="434975" indent="-342900">
+              <a:lnSpc>
+                <a:spcPct val="150000"/>
+              </a:lnSpc>
+              <a:buFont typeface="Arial" panose="020B0604020202020204" pitchFamily="34" charset="0"/>
+              <a:buChar char="•"/>
+            </a:pPr>
+            <a:r>
+              <a:rPr lang="ko-KR" altLang="en-US" sz="1600" spc="-50" dirty="0"/>
+              <a:t>특정 상품을 생산</a:t>
+            </a:r>
+            <a:r>
+              <a:rPr lang="en-US" altLang="ko-KR" sz="1600" spc="-50" dirty="0"/>
+              <a:t>·</a:t>
+            </a:r>
+            <a:r>
+              <a:rPr lang="ko-KR" altLang="en-US" sz="1600" spc="-50" dirty="0"/>
+              <a:t>소비함에 따라 사회 전체가 얻는 순편익은 사회 전체가 그만큼을 소비하여 얻는 편익에서 생산하기 위해 지불하는 비용을 </a:t>
+            </a:r>
+            <a:r>
+              <a:rPr lang="ko-KR" altLang="en-US" sz="1600" spc="-50" dirty="0" err="1"/>
+              <a:t>빼준</a:t>
+            </a:r>
+            <a:r>
+              <a:rPr lang="ko-KR" altLang="en-US" sz="1600" spc="-50" dirty="0"/>
+              <a:t> 것이어야 한다</a:t>
+            </a:r>
+            <a:r>
+              <a:rPr lang="en-US" altLang="ko-KR" sz="1600" spc="-50" dirty="0"/>
+              <a:t>.</a:t>
+            </a:r>
+          </a:p>
+          <a:p>
+            <a:pPr marL="892175" lvl="1" indent="-342900">
+              <a:lnSpc>
+                <a:spcPct val="150000"/>
+              </a:lnSpc>
+              <a:buFont typeface="Wingdings" panose="05000000000000000000" pitchFamily="2" charset="2"/>
+              <a:buChar char="ü"/>
+            </a:pPr>
+            <a:r>
+              <a:rPr lang="ko-KR" altLang="en-US" sz="1600" spc="-50" dirty="0"/>
+              <a:t>사회 전체의 순편익이 극대가 되는 그와 같은 상태를 경제의 가장 효율적인 상태라 규정하고</a:t>
+            </a:r>
+            <a:r>
+              <a:rPr lang="en-US" altLang="ko-KR" sz="1600" spc="-50" dirty="0"/>
+              <a:t>, </a:t>
+            </a:r>
+            <a:r>
+              <a:rPr lang="ko-KR" altLang="en-US" sz="1600" spc="-50" dirty="0"/>
+              <a:t>효율성이 자유경쟁시장에 의해 달성된다는 것을 확인할 수 있다</a:t>
+            </a:r>
+            <a:r>
+              <a:rPr lang="en-US" altLang="ko-KR" sz="1600" spc="-50" dirty="0"/>
+              <a:t>.</a:t>
+            </a:r>
+          </a:p>
+        </p:txBody>
+      </p:sp>
+      <p:pic>
+        <p:nvPicPr>
+          <p:cNvPr id="6" name="그림 5" descr="텍스트, 라인, 도표, 그래프이(가) 표시된 사진&#10;&#10;AI 생성 콘텐츠는 정확하지 않을 수 있습니다.">
+            <a:extLst>
+              <a:ext uri="{FF2B5EF4-FFF2-40B4-BE49-F238E27FC236}">
+                <a16:creationId xmlns:a16="http://schemas.microsoft.com/office/drawing/2014/main" id="{683C08B8-3541-E55E-31B5-B3842F3BE0A4}"/>
+              </a:ext>
+            </a:extLst>
+          </p:cNvPr>
+          <p:cNvPicPr>
+            <a:picLocks noChangeAspect="1"/>
+          </p:cNvPicPr>
+          <p:nvPr/>
+        </p:nvPicPr>
+        <p:blipFill>
+          <a:blip r:embed="rId2"/>
+          <a:stretch>
+            <a:fillRect/>
+          </a:stretch>
+        </p:blipFill>
+        <p:spPr>
+          <a:xfrm>
+            <a:off x="8532504" y="3010452"/>
+            <a:ext cx="3064153" cy="3466682"/>
+          </a:xfrm>
+          <a:prstGeom prst="rect">
+            <a:avLst/>
+          </a:prstGeom>
+        </p:spPr>
+      </p:pic>
+      <p:sp>
+        <p:nvSpPr>
+          <p:cNvPr id="8" name="TextBox 7">
+            <a:extLst>
+              <a:ext uri="{FF2B5EF4-FFF2-40B4-BE49-F238E27FC236}">
+                <a16:creationId xmlns:a16="http://schemas.microsoft.com/office/drawing/2014/main" id="{DD6140D0-9220-9D4A-4F90-64CC63110C78}"/>
+              </a:ext>
+            </a:extLst>
+          </p:cNvPr>
+          <p:cNvSpPr txBox="1"/>
+          <p:nvPr/>
+        </p:nvSpPr>
+        <p:spPr>
+          <a:xfrm>
+            <a:off x="288790" y="3476619"/>
+            <a:ext cx="8243714" cy="2999347"/>
+          </a:xfrm>
+          <a:prstGeom prst="rect">
+            <a:avLst/>
+          </a:prstGeom>
+          <a:noFill/>
+        </p:spPr>
+        <p:txBody>
+          <a:bodyPr wrap="square" rtlCol="0" anchor="t">
+            <a:spAutoFit/>
+          </a:bodyPr>
+          <a:lstStyle/>
+          <a:p>
+            <a:pPr marL="434975" indent="-342900">
+              <a:lnSpc>
+                <a:spcPct val="150000"/>
+              </a:lnSpc>
+              <a:buFont typeface="Arial" panose="020B0604020202020204" pitchFamily="34" charset="0"/>
+              <a:buChar char="•"/>
+            </a:pPr>
+            <a:r>
+              <a:rPr lang="ko-KR" altLang="en-US" sz="1600" spc="-50" dirty="0"/>
+              <a:t>자유경쟁시장 메커니즘에 의해 경제 효율성이 달성되는 이유는 시장균형에서는 한계지불의사와 한계비용이 동일하기 때문이다</a:t>
+            </a:r>
+            <a:r>
+              <a:rPr lang="en-US" altLang="ko-KR" sz="1600" spc="-50" dirty="0"/>
+              <a:t>.</a:t>
+            </a:r>
+          </a:p>
+          <a:p>
+            <a:pPr marL="892175" lvl="1" indent="-342900">
+              <a:lnSpc>
+                <a:spcPct val="150000"/>
+              </a:lnSpc>
+              <a:buFont typeface="Wingdings" panose="05000000000000000000" pitchFamily="2" charset="2"/>
+              <a:buChar char="ü"/>
+            </a:pPr>
+            <a:r>
+              <a:rPr lang="ko-KR" altLang="en-US" sz="1600" spc="-50" dirty="0"/>
+              <a:t>만약 경제 전체가 </a:t>
+            </a:r>
+            <a:r>
+              <a:rPr lang="en-US" altLang="ko-KR" sz="1600" spc="-50" dirty="0"/>
+              <a:t>7.5</a:t>
+            </a:r>
+            <a:r>
+              <a:rPr lang="ko-KR" altLang="en-US" sz="1600" spc="-50" dirty="0"/>
+              <a:t>보다 많은 </a:t>
+            </a:r>
+            <a:r>
+              <a:rPr lang="en-US" altLang="ko-KR" sz="1600" spc="-50" dirty="0"/>
+              <a:t>10</a:t>
+            </a:r>
+            <a:r>
+              <a:rPr lang="ko-KR" altLang="en-US" sz="1600" spc="-50" dirty="0"/>
+              <a:t>단위를 소비와 생산을 하고 있다면</a:t>
+            </a:r>
+            <a:r>
+              <a:rPr lang="en-US" altLang="ko-KR" sz="1600" spc="-50" dirty="0"/>
+              <a:t>, </a:t>
+            </a:r>
+            <a:r>
+              <a:rPr lang="ko-KR" altLang="en-US" sz="1600" spc="-50" dirty="0"/>
+              <a:t>상품 한 단위의 한계지불의사는 한계생산비용보다 작다</a:t>
+            </a:r>
+            <a:r>
+              <a:rPr lang="en-US" altLang="ko-KR" sz="1600" spc="-50" dirty="0"/>
+              <a:t>.</a:t>
+            </a:r>
+          </a:p>
+          <a:p>
+            <a:pPr marL="1349375" lvl="2" indent="-342900">
+              <a:lnSpc>
+                <a:spcPct val="150000"/>
+              </a:lnSpc>
+              <a:buFont typeface="Wingdings" panose="05000000000000000000" pitchFamily="2" charset="2"/>
+              <a:buChar char="Ø"/>
+            </a:pPr>
+            <a:r>
+              <a:rPr lang="ko-KR" altLang="en-US" sz="1600" spc="-50" dirty="0"/>
+              <a:t>이 때 </a:t>
+            </a:r>
+            <a:r>
+              <a:rPr lang="en-US" altLang="ko-KR" sz="1600" spc="-50" dirty="0"/>
+              <a:t>10</a:t>
+            </a:r>
+            <a:r>
+              <a:rPr lang="ko-KR" altLang="en-US" sz="1600" spc="-50" dirty="0"/>
+              <a:t>단위에서 소비를 줄이면 편익이 줄어드는 정도보다 비용이 감소하는 정도가 더 크다</a:t>
+            </a:r>
+            <a:r>
+              <a:rPr lang="en-US" altLang="ko-KR" sz="1600" spc="-50" dirty="0"/>
+              <a:t>. </a:t>
+            </a:r>
+            <a:r>
+              <a:rPr lang="ko-KR" altLang="en-US" sz="1600" spc="-50" dirty="0"/>
+              <a:t>따라서 사회 전체의 순편익이 증가한다</a:t>
+            </a:r>
+            <a:r>
+              <a:rPr lang="en-US" altLang="ko-KR" sz="1600" spc="-50" dirty="0"/>
+              <a:t>.</a:t>
+            </a:r>
+          </a:p>
+          <a:p>
+            <a:pPr marL="892175" lvl="1" indent="-342900">
+              <a:lnSpc>
+                <a:spcPct val="150000"/>
+              </a:lnSpc>
+              <a:buFont typeface="Wingdings" panose="05000000000000000000" pitchFamily="2" charset="2"/>
+              <a:buChar char="ü"/>
+            </a:pPr>
+            <a:r>
+              <a:rPr lang="ko-KR" altLang="en-US" sz="1600" spc="-50" dirty="0"/>
+              <a:t>만약 경제 전체가 </a:t>
+            </a:r>
+            <a:r>
+              <a:rPr lang="en-US" altLang="ko-KR" sz="1600" spc="-50" dirty="0"/>
+              <a:t>7.5</a:t>
+            </a:r>
+            <a:r>
+              <a:rPr lang="ko-KR" altLang="en-US" sz="1600" spc="-50" dirty="0"/>
+              <a:t>보다 적은 </a:t>
+            </a:r>
+            <a:r>
+              <a:rPr lang="en-US" altLang="ko-KR" sz="1600" spc="-50" dirty="0"/>
+              <a:t>6</a:t>
+            </a:r>
+            <a:r>
+              <a:rPr lang="ko-KR" altLang="en-US" sz="1600" spc="-50" dirty="0"/>
+              <a:t>단위를 소비와 생산하고 있는 경우를 생각해보면</a:t>
+            </a:r>
+            <a:r>
+              <a:rPr lang="en-US" altLang="ko-KR" sz="1600" spc="-50" dirty="0"/>
+              <a:t>, </a:t>
+            </a:r>
+            <a:r>
+              <a:rPr lang="ko-KR" altLang="en-US" sz="1600" spc="-50" dirty="0"/>
+              <a:t>이때는 </a:t>
+            </a:r>
+            <a:r>
+              <a:rPr lang="en-US" altLang="ko-KR" sz="1600" spc="-50" dirty="0"/>
+              <a:t>6</a:t>
+            </a:r>
+            <a:r>
+              <a:rPr lang="ko-KR" altLang="en-US" sz="1600" spc="-50" dirty="0"/>
+              <a:t>단위에서 소비를 더 늘리면 순편익이 증가하게 된다</a:t>
+            </a:r>
+            <a:r>
+              <a:rPr lang="en-US" altLang="ko-KR" sz="1600" spc="-50" dirty="0"/>
+              <a:t>.</a:t>
+            </a:r>
+          </a:p>
+        </p:txBody>
+      </p:sp>
+    </p:spTree>
+    <p:extLst>
+      <p:ext uri="{BB962C8B-B14F-4D97-AF65-F5344CB8AC3E}">
+        <p14:creationId xmlns:p14="http://schemas.microsoft.com/office/powerpoint/2010/main" val="3025116013"/>
+      </p:ext>
+    </p:extLst>
+  </p:cSld>
+  <p:clrMapOvr>
+    <a:masterClrMapping/>
+  </p:clrMapOvr>
+</p:sld>
+</file>
+
+<file path=ppt/slides/slide24.xml><?xml version="1.0" encoding="utf-8"?>
+<p:sld xmlns:a="http://schemas.openxmlformats.org/drawingml/2006/main" xmlns:r="http://schemas.openxmlformats.org/officeDocument/2006/relationships" xmlns:p="http://schemas.openxmlformats.org/presentationml/2006/main">
+  <p:cSld>
+    <p:spTree>
+      <p:nvGrpSpPr>
+        <p:cNvPr id="1" name="">
+          <a:extLst>
+            <a:ext uri="{FF2B5EF4-FFF2-40B4-BE49-F238E27FC236}">
               <a16:creationId xmlns:a16="http://schemas.microsoft.com/office/drawing/2014/main" id="{9AC8B0EB-74B1-B51C-A4E6-7DD41C0B047F}"/>
             </a:ext>
           </a:extLst>
@@ -11377,7 +12486,7 @@
           <a:p>
             <a:fld id="{109C872D-39A9-4065-8BF3-6A613116E2A1}" type="slidenum">
               <a:rPr lang="ko-KR" altLang="en-US" smtClean="0"/>
-              <a:t>21</a:t>
+              <a:t>24</a:t>
             </a:fld>
             <a:endParaRPr lang="ko-KR" altLang="en-US"/>
           </a:p>
@@ -13118,8 +14227,8 @@
           </a:prstGeom>
         </p:spPr>
       </p:pic>
-      <mc:AlternateContent xmlns:mc="http://schemas.openxmlformats.org/markup-compatibility/2006">
-        <mc:Choice xmlns:a14="http://schemas.microsoft.com/office/drawing/2010/main" Requires="a14">
+      <mc:AlternateContent xmlns:mc="http://schemas.openxmlformats.org/markup-compatibility/2006" xmlns:a14="http://schemas.microsoft.com/office/drawing/2010/main">
+        <mc:Choice Requires="a14">
           <p:sp>
             <p:nvSpPr>
               <p:cNvPr id="9" name="TextBox 8">
@@ -13243,7 +14352,7 @@
             </p:txBody>
           </p:sp>
         </mc:Choice>
-        <mc:Fallback>
+        <mc:Fallback xmlns="">
           <p:sp>
             <p:nvSpPr>
               <p:cNvPr id="9" name="TextBox 8">
@@ -13288,8 +14397,8 @@
           </p:sp>
         </mc:Fallback>
       </mc:AlternateContent>
-      <mc:AlternateContent xmlns:mc="http://schemas.openxmlformats.org/markup-compatibility/2006">
-        <mc:Choice xmlns:a14="http://schemas.microsoft.com/office/drawing/2010/main" Requires="a14">
+      <mc:AlternateContent xmlns:mc="http://schemas.openxmlformats.org/markup-compatibility/2006" xmlns:a14="http://schemas.microsoft.com/office/drawing/2010/main">
+        <mc:Choice Requires="a14">
           <p:sp>
             <p:nvSpPr>
               <p:cNvPr id="11" name="TextBox 10">
@@ -13413,7 +14522,7 @@
             </p:txBody>
           </p:sp>
         </mc:Choice>
-        <mc:Fallback>
+        <mc:Fallback xmlns="">
           <p:sp>
             <p:nvSpPr>
               <p:cNvPr id="11" name="TextBox 10">
@@ -13458,8 +14567,8 @@
           </p:sp>
         </mc:Fallback>
       </mc:AlternateContent>
-      <mc:AlternateContent xmlns:mc="http://schemas.openxmlformats.org/markup-compatibility/2006">
-        <mc:Choice xmlns:a14="http://schemas.microsoft.com/office/drawing/2010/main" Requires="a14">
+      <mc:AlternateContent xmlns:mc="http://schemas.openxmlformats.org/markup-compatibility/2006" xmlns:a14="http://schemas.microsoft.com/office/drawing/2010/main">
+        <mc:Choice Requires="a14">
           <p:sp>
             <p:nvSpPr>
               <p:cNvPr id="13" name="TextBox 12">
@@ -13608,7 +14717,7 @@
             </p:txBody>
           </p:sp>
         </mc:Choice>
-        <mc:Fallback>
+        <mc:Fallback xmlns="">
           <p:sp>
             <p:nvSpPr>
               <p:cNvPr id="13" name="TextBox 12">
